--- a/Week 5/Day 22/Lecture Day 22 - Introduction to MongoDB.pptx
+++ b/Week 5/Day 22/Lecture Day 22 - Introduction to MongoDB.pptx
@@ -5,7 +5,7 @@
     <p:sldMasterId id="2147483648" r:id="rId1"/>
   </p:sldMasterIdLst>
   <p:notesMasterIdLst>
-    <p:notesMasterId r:id="rId48"/>
+    <p:notesMasterId r:id="rId44"/>
   </p:notesMasterIdLst>
   <p:sldIdLst>
     <p:sldId id="256" r:id="rId2"/>
@@ -43,17 +43,13 @@
     <p:sldId id="288" r:id="rId34"/>
     <p:sldId id="289" r:id="rId35"/>
     <p:sldId id="290" r:id="rId36"/>
-    <p:sldId id="291" r:id="rId37"/>
-    <p:sldId id="292" r:id="rId38"/>
-    <p:sldId id="293" r:id="rId39"/>
-    <p:sldId id="294" r:id="rId40"/>
-    <p:sldId id="295" r:id="rId41"/>
-    <p:sldId id="296" r:id="rId42"/>
-    <p:sldId id="297" r:id="rId43"/>
-    <p:sldId id="298" r:id="rId44"/>
-    <p:sldId id="299" r:id="rId45"/>
-    <p:sldId id="300" r:id="rId46"/>
-    <p:sldId id="301" r:id="rId47"/>
+    <p:sldId id="295" r:id="rId37"/>
+    <p:sldId id="296" r:id="rId38"/>
+    <p:sldId id="297" r:id="rId39"/>
+    <p:sldId id="298" r:id="rId40"/>
+    <p:sldId id="299" r:id="rId41"/>
+    <p:sldId id="300" r:id="rId42"/>
+    <p:sldId id="301" r:id="rId43"/>
   </p:sldIdLst>
   <p:sldSz cx="9144000" cy="6858000" type="screen4x3"/>
   <p:notesSz cx="6858000" cy="9144000"/>
@@ -1681,6 +1677,7 @@
           <a:lstStyle/>
           <a:p>
             <a:r>
+              <a:rPr dirty="0"/>
               <a:t>Mention populate() in Mongoose for JOIN-like reads.</a:t>
             </a:r>
           </a:p>
@@ -1966,7 +1963,7 @@
           <a:lstStyle/>
           <a:p>
             <a:r>
-              <a:t>Next lab/day: npm install mongoose, connect, define Product schema.</a:t>
+              <a:t>Example injection: { "$gt": "" } in login — use typed queries / Mongoose.</a:t>
             </a:r>
           </a:p>
         </p:txBody>
@@ -2036,7 +2033,7 @@
           <a:lstStyle/>
           <a:p>
             <a:r>
-              <a:t>timestamps: true adds createdAt/updatedAt — highlight convenience.</a:t>
+              <a:t>Pagination: for production prefer cursor-based over large skip values.</a:t>
             </a:r>
           </a:p>
         </p:txBody>
@@ -2106,7 +2103,7 @@
           <a:lstStyle/>
           <a:p>
             <a:r>
-              <a:t>Connects to their React fetch/Redux patterns — same JSON, now from their DB.</a:t>
+              <a:t>ObjectId vs string: use new ObjectId(id) or mongoose.Types.ObjectId.isValid.</a:t>
             </a:r>
           </a:p>
         </p:txBody>
@@ -2176,7 +2173,7 @@
           <a:lstStyle/>
           <a:p>
             <a:r>
-              <a:t>Example injection: { "$gt": "" } in login — use typed queries / Mongoose.</a:t>
+              <a:t>Point to lab PDF if you publish one. Align with future assignment.</a:t>
             </a:r>
           </a:p>
         </p:txBody>
@@ -2246,7 +2243,7 @@
           <a:lstStyle/>
           <a:p>
             <a:r>
-              <a:t>Pagination: for production prefer cursor-based over large skip values.</a:t>
+              <a:t>2 min Q&amp;A. Assign reading: MongoDB University M001 first chapters (free).</a:t>
             </a:r>
           </a:p>
         </p:txBody>
@@ -2272,216 +2269,6 @@
 </file>
 
 <file path=ppt/notesSlides/notesSlide35.xml><?xml version="1.0" encoding="utf-8"?>
-<p:notes xmlns:a="http://schemas.openxmlformats.org/drawingml/2006/main" xmlns:r="http://schemas.openxmlformats.org/officeDocument/2006/relationships" xmlns:p="http://schemas.openxmlformats.org/presentationml/2006/main">
-  <p:cSld>
-    <p:spTree>
-      <p:nvGrpSpPr>
-        <p:cNvPr id="1" name=""/>
-        <p:cNvGrpSpPr/>
-        <p:nvPr/>
-      </p:nvGrpSpPr>
-      <p:grpSpPr>
-        <a:xfrm>
-          <a:off x="0" y="0"/>
-          <a:ext cx="0" cy="0"/>
-          <a:chOff x="0" y="0"/>
-          <a:chExt cx="0" cy="0"/>
-        </a:xfrm>
-      </p:grpSpPr>
-      <p:sp>
-        <p:nvSpPr>
-          <p:cNvPr id="2" name="Slide Image Placeholder 1"/>
-          <p:cNvSpPr>
-            <a:spLocks noGrp="1" noRot="1" noChangeAspect="1"/>
-          </p:cNvSpPr>
-          <p:nvPr>
-            <p:ph type="sldImg" idx="2"/>
-          </p:nvPr>
-        </p:nvSpPr>
-        <p:spPr/>
-      </p:sp>
-      <p:sp>
-        <p:nvSpPr>
-          <p:cNvPr id="3" name="Notes Placeholder 2"/>
-          <p:cNvSpPr>
-            <a:spLocks noGrp="1"/>
-          </p:cNvSpPr>
-          <p:nvPr>
-            <p:ph type="body" sz="quarter" idx="3"/>
-          </p:nvPr>
-        </p:nvSpPr>
-        <p:spPr/>
-        <p:txBody>
-          <a:bodyPr/>
-          <a:lstStyle/>
-          <a:p>
-            <a:r>
-              <a:t>ObjectId vs string: use new ObjectId(id) or mongoose.Types.ObjectId.isValid.</a:t>
-            </a:r>
-          </a:p>
-        </p:txBody>
-      </p:sp>
-      <p:sp>
-        <p:nvSpPr>
-          <p:cNvPr id="4" name="Slide Number Placeholder 3"/>
-          <p:cNvSpPr>
-            <a:spLocks noGrp="1"/>
-          </p:cNvSpPr>
-          <p:nvPr>
-            <p:ph type="sldNum" sz="quarter" idx="5"/>
-          </p:nvPr>
-        </p:nvSpPr>
-        <p:spPr/>
-      </p:sp>
-    </p:spTree>
-  </p:cSld>
-  <p:clrMapOvr>
-    <a:masterClrMapping/>
-  </p:clrMapOvr>
-</p:notes>
-</file>
-
-<file path=ppt/notesSlides/notesSlide36.xml><?xml version="1.0" encoding="utf-8"?>
-<p:notes xmlns:a="http://schemas.openxmlformats.org/drawingml/2006/main" xmlns:r="http://schemas.openxmlformats.org/officeDocument/2006/relationships" xmlns:p="http://schemas.openxmlformats.org/presentationml/2006/main">
-  <p:cSld>
-    <p:spTree>
-      <p:nvGrpSpPr>
-        <p:cNvPr id="1" name=""/>
-        <p:cNvGrpSpPr/>
-        <p:nvPr/>
-      </p:nvGrpSpPr>
-      <p:grpSpPr>
-        <a:xfrm>
-          <a:off x="0" y="0"/>
-          <a:ext cx="0" cy="0"/>
-          <a:chOff x="0" y="0"/>
-          <a:chExt cx="0" cy="0"/>
-        </a:xfrm>
-      </p:grpSpPr>
-      <p:sp>
-        <p:nvSpPr>
-          <p:cNvPr id="2" name="Slide Image Placeholder 1"/>
-          <p:cNvSpPr>
-            <a:spLocks noGrp="1" noRot="1" noChangeAspect="1"/>
-          </p:cNvSpPr>
-          <p:nvPr>
-            <p:ph type="sldImg" idx="2"/>
-          </p:nvPr>
-        </p:nvSpPr>
-        <p:spPr/>
-      </p:sp>
-      <p:sp>
-        <p:nvSpPr>
-          <p:cNvPr id="3" name="Notes Placeholder 2"/>
-          <p:cNvSpPr>
-            <a:spLocks noGrp="1"/>
-          </p:cNvSpPr>
-          <p:nvPr>
-            <p:ph type="body" sz="quarter" idx="3"/>
-          </p:nvPr>
-        </p:nvSpPr>
-        <p:spPr/>
-        <p:txBody>
-          <a:bodyPr/>
-          <a:lstStyle/>
-          <a:p>
-            <a:r>
-              <a:t>Point to lab PDF if you publish one. Align with future assignment.</a:t>
-            </a:r>
-          </a:p>
-        </p:txBody>
-      </p:sp>
-      <p:sp>
-        <p:nvSpPr>
-          <p:cNvPr id="4" name="Slide Number Placeholder 3"/>
-          <p:cNvSpPr>
-            <a:spLocks noGrp="1"/>
-          </p:cNvSpPr>
-          <p:nvPr>
-            <p:ph type="sldNum" sz="quarter" idx="5"/>
-          </p:nvPr>
-        </p:nvSpPr>
-        <p:spPr/>
-      </p:sp>
-    </p:spTree>
-  </p:cSld>
-  <p:clrMapOvr>
-    <a:masterClrMapping/>
-  </p:clrMapOvr>
-</p:notes>
-</file>
-
-<file path=ppt/notesSlides/notesSlide37.xml><?xml version="1.0" encoding="utf-8"?>
-<p:notes xmlns:a="http://schemas.openxmlformats.org/drawingml/2006/main" xmlns:r="http://schemas.openxmlformats.org/officeDocument/2006/relationships" xmlns:p="http://schemas.openxmlformats.org/presentationml/2006/main">
-  <p:cSld>
-    <p:spTree>
-      <p:nvGrpSpPr>
-        <p:cNvPr id="1" name=""/>
-        <p:cNvGrpSpPr/>
-        <p:nvPr/>
-      </p:nvGrpSpPr>
-      <p:grpSpPr>
-        <a:xfrm>
-          <a:off x="0" y="0"/>
-          <a:ext cx="0" cy="0"/>
-          <a:chOff x="0" y="0"/>
-          <a:chExt cx="0" cy="0"/>
-        </a:xfrm>
-      </p:grpSpPr>
-      <p:sp>
-        <p:nvSpPr>
-          <p:cNvPr id="2" name="Slide Image Placeholder 1"/>
-          <p:cNvSpPr>
-            <a:spLocks noGrp="1" noRot="1" noChangeAspect="1"/>
-          </p:cNvSpPr>
-          <p:nvPr>
-            <p:ph type="sldImg" idx="2"/>
-          </p:nvPr>
-        </p:nvSpPr>
-        <p:spPr/>
-      </p:sp>
-      <p:sp>
-        <p:nvSpPr>
-          <p:cNvPr id="3" name="Notes Placeholder 2"/>
-          <p:cNvSpPr>
-            <a:spLocks noGrp="1"/>
-          </p:cNvSpPr>
-          <p:nvPr>
-            <p:ph type="body" sz="quarter" idx="3"/>
-          </p:nvPr>
-        </p:nvSpPr>
-        <p:spPr/>
-        <p:txBody>
-          <a:bodyPr/>
-          <a:lstStyle/>
-          <a:p>
-            <a:r>
-              <a:t>2 min Q&amp;A. Assign reading: MongoDB University M001 first chapters (free).</a:t>
-            </a:r>
-          </a:p>
-        </p:txBody>
-      </p:sp>
-      <p:sp>
-        <p:nvSpPr>
-          <p:cNvPr id="4" name="Slide Number Placeholder 3"/>
-          <p:cNvSpPr>
-            <a:spLocks noGrp="1"/>
-          </p:cNvSpPr>
-          <p:nvPr>
-            <p:ph type="sldNum" sz="quarter" idx="5"/>
-          </p:nvPr>
-        </p:nvSpPr>
-        <p:spPr/>
-      </p:sp>
-    </p:spTree>
-  </p:cSld>
-  <p:clrMapOvr>
-    <a:masterClrMapping/>
-  </p:clrMapOvr>
-</p:notes>
-</file>
-
-<file path=ppt/notesSlides/notesSlide38.xml><?xml version="1.0" encoding="utf-8"?>
 <p:notes xmlns:a="http://schemas.openxmlformats.org/drawingml/2006/main" xmlns:r="http://schemas.openxmlformats.org/officeDocument/2006/relationships" xmlns:p="http://schemas.openxmlformats.org/presentationml/2006/main">
   <p:cSld>
     <p:spTree>
@@ -9928,16 +9715,12 @@
             </a:pPr>
             <a:r>
               <a:rPr dirty="0"/>
-              <a:t>• Atlas Search — advanced hosted </a:t>
-            </a:r>
-            <a:r>
-              <a:t>featur</a:t>
-            </a:r>
-            <a:r>
-              <a:rPr lang="en-US"/>
+              <a:t>• Atlas Search — advanced hosted featur</a:t>
+            </a:r>
+            <a:r>
+              <a:rPr lang="en-US" dirty="0"/>
               <a:t>e</a:t>
             </a:r>
-            <a:endParaRPr lang="en-US" dirty="0"/>
           </a:p>
         </p:txBody>
       </p:sp>
@@ -10266,58 +10049,14 @@
       </p:grpSpPr>
       <p:sp>
         <p:nvSpPr>
-          <p:cNvPr id="2" name="Rectangle 1"/>
-          <p:cNvSpPr/>
-          <p:nvPr/>
-        </p:nvSpPr>
-        <p:spPr>
-          <a:xfrm>
-            <a:off x="0" y="2560320"/>
-            <a:ext cx="9144000" cy="2011680"/>
-          </a:xfrm>
-          <a:prstGeom prst="rect">
-            <a:avLst/>
-          </a:prstGeom>
-          <a:solidFill>
-            <a:srgbClr val="232B2B"/>
-          </a:solidFill>
-          <a:ln>
-            <a:noFill/>
-          </a:ln>
-        </p:spPr>
-        <p:style>
-          <a:lnRef idx="1">
-            <a:schemeClr val="accent1"/>
-          </a:lnRef>
-          <a:fillRef idx="3">
-            <a:schemeClr val="accent1"/>
-          </a:fillRef>
-          <a:effectRef idx="2">
-            <a:schemeClr val="accent1"/>
-          </a:effectRef>
-          <a:fontRef idx="minor">
-            <a:schemeClr val="lt1"/>
-          </a:fontRef>
-        </p:style>
-        <p:txBody>
-          <a:bodyPr rtlCol="0" anchor="ctr"/>
-          <a:lstStyle/>
-          <a:p>
-            <a:pPr algn="ctr"/>
-            <a:endParaRPr/>
-          </a:p>
-        </p:txBody>
-      </p:sp>
-      <p:sp>
-        <p:nvSpPr>
           <p:cNvPr id="3" name="TextBox 2"/>
           <p:cNvSpPr txBox="1"/>
           <p:nvPr/>
         </p:nvSpPr>
         <p:spPr>
           <a:xfrm>
-            <a:off x="731520" y="2834640"/>
-            <a:ext cx="7680960" cy="1097280"/>
+            <a:off x="1779729" y="2704011"/>
+            <a:ext cx="5584542" cy="646331"/>
           </a:xfrm>
           <a:prstGeom prst="rect">
             <a:avLst/>
@@ -10338,42 +10077,12 @@
               </a:defRPr>
             </a:pPr>
             <a:r>
+              <a:rPr dirty="0">
+                <a:solidFill>
+                  <a:srgbClr val="002060"/>
+                </a:solidFill>
+              </a:rPr>
               <a:t>6 · Schema design &amp; indexes</a:t>
-            </a:r>
-          </a:p>
-        </p:txBody>
-      </p:sp>
-      <p:sp>
-        <p:nvSpPr>
-          <p:cNvPr id="4" name="TextBox 3"/>
-          <p:cNvSpPr txBox="1"/>
-          <p:nvPr/>
-        </p:nvSpPr>
-        <p:spPr>
-          <a:xfrm>
-            <a:off x="731520" y="3657600"/>
-            <a:ext cx="3657600" cy="457200"/>
-          </a:xfrm>
-          <a:prstGeom prst="rect">
-            <a:avLst/>
-          </a:prstGeom>
-          <a:noFill/>
-        </p:spPr>
-        <p:txBody>
-          <a:bodyPr wrap="none">
-            <a:spAutoFit/>
-          </a:bodyPr>
-          <a:lstStyle/>
-          <a:p>
-            <a:pPr>
-              <a:defRPr sz="1800">
-                <a:solidFill>
-                  <a:srgbClr val="00ED64"/>
-                </a:solidFill>
-              </a:defRPr>
-            </a:pPr>
-            <a:r>
-              <a:t>~10 minutes</a:t>
             </a:r>
           </a:p>
         </p:txBody>
@@ -10630,7 +10339,7 @@
         </p:nvSpPr>
         <p:spPr>
           <a:xfrm>
-            <a:off x="502920" y="3520440"/>
+            <a:off x="337457" y="2103120"/>
             <a:ext cx="8229600" cy="2651760"/>
           </a:xfrm>
           <a:prstGeom prst="rect">
@@ -10655,6 +10364,7 @@
               </a:defRPr>
             </a:pPr>
             <a:r>
+              <a:rPr dirty="0"/>
               <a:t>// Order with embedded line items (good for read-heavy checkout)</a:t>
             </a:r>
           </a:p>
@@ -10668,6 +10378,7 @@
               </a:defRPr>
             </a:pPr>
             <a:r>
+              <a:rPr dirty="0"/>
               <a:t>{</a:t>
             </a:r>
           </a:p>
@@ -10681,7 +10392,16 @@
               </a:defRPr>
             </a:pPr>
             <a:r>
-              <a:t>  "_id": ObjectId("..."),</a:t>
+              <a:rPr dirty="0"/>
+              <a:t>  "_id": </a:t>
+            </a:r>
+            <a:r>
+              <a:rPr dirty="0" err="1"/>
+              <a:t>ObjectId</a:t>
+            </a:r>
+            <a:r>
+              <a:rPr dirty="0"/>
+              <a:t>("..."),</a:t>
             </a:r>
           </a:p>
           <a:p>
@@ -10694,7 +10414,24 @@
               </a:defRPr>
             </a:pPr>
             <a:r>
-              <a:t>  "userId": ObjectId("..."),</a:t>
+              <a:rPr dirty="0"/>
+              <a:t>  "</a:t>
+            </a:r>
+            <a:r>
+              <a:rPr dirty="0" err="1"/>
+              <a:t>userId</a:t>
+            </a:r>
+            <a:r>
+              <a:rPr dirty="0"/>
+              <a:t>": </a:t>
+            </a:r>
+            <a:r>
+              <a:rPr dirty="0" err="1"/>
+              <a:t>ObjectId</a:t>
+            </a:r>
+            <a:r>
+              <a:rPr dirty="0"/>
+              <a:t>("..."),</a:t>
             </a:r>
           </a:p>
           <a:p>
@@ -10707,6 +10444,7 @@
               </a:defRPr>
             </a:pPr>
             <a:r>
+              <a:rPr dirty="0"/>
               <a:t>  "items": [</a:t>
             </a:r>
           </a:p>
@@ -10720,7 +10458,24 @@
               </a:defRPr>
             </a:pPr>
             <a:r>
-              <a:t>    { "productId": ObjectId("..."), "title": "Mouse", "qty": 2, "price": 29.99 }</a:t>
+              <a:rPr dirty="0"/>
+              <a:t>    { "</a:t>
+            </a:r>
+            <a:r>
+              <a:rPr dirty="0" err="1"/>
+              <a:t>productId</a:t>
+            </a:r>
+            <a:r>
+              <a:rPr dirty="0"/>
+              <a:t>": </a:t>
+            </a:r>
+            <a:r>
+              <a:rPr dirty="0" err="1"/>
+              <a:t>ObjectId</a:t>
+            </a:r>
+            <a:r>
+              <a:rPr dirty="0"/>
+              <a:t>("..."), "title": "Mouse", "qty": 2, "price": 29.99 }</a:t>
             </a:r>
           </a:p>
           <a:p>
@@ -10733,6 +10488,7 @@
               </a:defRPr>
             </a:pPr>
             <a:r>
+              <a:rPr dirty="0"/>
               <a:t>  ],</a:t>
             </a:r>
           </a:p>
@@ -10746,6 +10502,7 @@
               </a:defRPr>
             </a:pPr>
             <a:r>
+              <a:rPr dirty="0"/>
               <a:t>  "total": 59.98,</a:t>
             </a:r>
           </a:p>
@@ -10759,7 +10516,24 @@
               </a:defRPr>
             </a:pPr>
             <a:r>
-              <a:t>  "createdAt": ISODate("2026-05-19T10:00:00Z")</a:t>
+              <a:rPr dirty="0"/>
+              <a:t>  "</a:t>
+            </a:r>
+            <a:r>
+              <a:rPr dirty="0" err="1"/>
+              <a:t>createdAt</a:t>
+            </a:r>
+            <a:r>
+              <a:rPr dirty="0"/>
+              <a:t>": </a:t>
+            </a:r>
+            <a:r>
+              <a:rPr dirty="0" err="1"/>
+              <a:t>ISODate</a:t>
+            </a:r>
+            <a:r>
+              <a:rPr dirty="0"/>
+              <a:t>("2026-05-19T10:00:00Z")</a:t>
             </a:r>
           </a:p>
           <a:p>
@@ -10772,6 +10546,7 @@
               </a:defRPr>
             </a:pPr>
             <a:r>
+              <a:rPr dirty="0"/>
               <a:t>}</a:t>
             </a:r>
           </a:p>
@@ -10871,7 +10646,7 @@
         </p:nvSpPr>
         <p:spPr>
           <a:xfrm>
-            <a:off x="502920" y="3520440"/>
+            <a:off x="502920" y="2103120"/>
             <a:ext cx="8229600" cy="2651760"/>
           </a:xfrm>
           <a:prstGeom prst="rect">
@@ -11112,7 +10887,12 @@
               </a:defRPr>
             </a:pPr>
             <a:r>
-              <a:t>db.createCollection("products", {</a:t>
+              <a:rPr dirty="0" err="1"/>
+              <a:t>db.createCollection</a:t>
+            </a:r>
+            <a:r>
+              <a:rPr dirty="0"/>
+              <a:t>("products", {</a:t>
             </a:r>
           </a:p>
           <a:p>
@@ -11125,6 +10905,7 @@
               </a:defRPr>
             </a:pPr>
             <a:r>
+              <a:rPr dirty="0"/>
               <a:t>  validator: {</a:t>
             </a:r>
           </a:p>
@@ -11138,7 +10919,16 @@
               </a:defRPr>
             </a:pPr>
             <a:r>
-              <a:t>    $jsonSchema: {</a:t>
+              <a:rPr dirty="0"/>
+              <a:t>    $</a:t>
+            </a:r>
+            <a:r>
+              <a:rPr dirty="0" err="1"/>
+              <a:t>jsonSchema</a:t>
+            </a:r>
+            <a:r>
+              <a:rPr dirty="0"/>
+              <a:t>: {</a:t>
             </a:r>
           </a:p>
           <a:p>
@@ -11151,7 +10941,16 @@
               </a:defRPr>
             </a:pPr>
             <a:r>
-              <a:t>      bsonType: "object",</a:t>
+              <a:rPr dirty="0"/>
+              <a:t>      </a:t>
+            </a:r>
+            <a:r>
+              <a:rPr dirty="0" err="1"/>
+              <a:t>bsonType</a:t>
+            </a:r>
+            <a:r>
+              <a:rPr dirty="0"/>
+              <a:t>: "object",</a:t>
             </a:r>
           </a:p>
           <a:p>
@@ -11164,6 +10963,7 @@
               </a:defRPr>
             </a:pPr>
             <a:r>
+              <a:rPr dirty="0"/>
               <a:t>      required: ["title", "price"],</a:t>
             </a:r>
           </a:p>
@@ -11177,6 +10977,7 @@
               </a:defRPr>
             </a:pPr>
             <a:r>
+              <a:rPr dirty="0"/>
               <a:t>      properties: {</a:t>
             </a:r>
           </a:p>
@@ -11190,7 +10991,16 @@
               </a:defRPr>
             </a:pPr>
             <a:r>
-              <a:t>        title: { bsonType: "string" },</a:t>
+              <a:rPr dirty="0"/>
+              <a:t>        title: { </a:t>
+            </a:r>
+            <a:r>
+              <a:rPr dirty="0" err="1"/>
+              <a:t>bsonType</a:t>
+            </a:r>
+            <a:r>
+              <a:rPr dirty="0"/>
+              <a:t>: "string" },</a:t>
             </a:r>
           </a:p>
           <a:p>
@@ -11203,7 +11013,16 @@
               </a:defRPr>
             </a:pPr>
             <a:r>
-              <a:t>        price: { bsonType: ["int", "double"], minimum: 0 }</a:t>
+              <a:rPr dirty="0"/>
+              <a:t>        price: { </a:t>
+            </a:r>
+            <a:r>
+              <a:rPr dirty="0" err="1"/>
+              <a:t>bsonType</a:t>
+            </a:r>
+            <a:r>
+              <a:rPr dirty="0"/>
+              <a:t>: ["int", "double"], minimum: 0 }</a:t>
             </a:r>
           </a:p>
           <a:p>
@@ -11216,6 +11035,7 @@
               </a:defRPr>
             </a:pPr>
             <a:r>
+              <a:rPr dirty="0"/>
               <a:t>      }</a:t>
             </a:r>
           </a:p>
@@ -11229,6 +11049,7 @@
               </a:defRPr>
             </a:pPr>
             <a:r>
+              <a:rPr dirty="0"/>
               <a:t>    }</a:t>
             </a:r>
           </a:p>
@@ -11242,6 +11063,7 @@
               </a:defRPr>
             </a:pPr>
             <a:r>
+              <a:rPr dirty="0"/>
               <a:t>  }</a:t>
             </a:r>
           </a:p>
@@ -11255,6 +11077,7 @@
               </a:defRPr>
             </a:pPr>
             <a:r>
+              <a:rPr dirty="0"/>
               <a:t>})</a:t>
             </a:r>
           </a:p>
@@ -11509,58 +11332,14 @@
       </p:grpSpPr>
       <p:sp>
         <p:nvSpPr>
-          <p:cNvPr id="2" name="Rectangle 1"/>
-          <p:cNvSpPr/>
+          <p:cNvPr id="2" name="TextBox 1"/>
+          <p:cNvSpPr txBox="1"/>
           <p:nvPr/>
         </p:nvSpPr>
         <p:spPr>
           <a:xfrm>
-            <a:off x="0" y="2560320"/>
-            <a:ext cx="9144000" cy="2011680"/>
-          </a:xfrm>
-          <a:prstGeom prst="rect">
-            <a:avLst/>
-          </a:prstGeom>
-          <a:solidFill>
-            <a:srgbClr val="232B2B"/>
-          </a:solidFill>
-          <a:ln>
-            <a:noFill/>
-          </a:ln>
-        </p:spPr>
-        <p:style>
-          <a:lnRef idx="1">
-            <a:schemeClr val="accent1"/>
-          </a:lnRef>
-          <a:fillRef idx="3">
-            <a:schemeClr val="accent1"/>
-          </a:fillRef>
-          <a:effectRef idx="2">
-            <a:schemeClr val="accent1"/>
-          </a:effectRef>
-          <a:fontRef idx="minor">
-            <a:schemeClr val="lt1"/>
-          </a:fontRef>
-        </p:style>
-        <p:txBody>
-          <a:bodyPr rtlCol="0" anchor="ctr"/>
-          <a:lstStyle/>
-          <a:p>
-            <a:pPr algn="ctr"/>
-            <a:endParaRPr/>
-          </a:p>
-        </p:txBody>
-      </p:sp>
-      <p:sp>
-        <p:nvSpPr>
-          <p:cNvPr id="3" name="TextBox 2"/>
-          <p:cNvSpPr txBox="1"/>
-          <p:nvPr/>
-        </p:nvSpPr>
-        <p:spPr>
-          <a:xfrm>
-            <a:off x="731520" y="2834640"/>
-            <a:ext cx="7680960" cy="1097280"/>
+            <a:off x="457200" y="320040"/>
+            <a:ext cx="8229600" cy="731520"/>
           </a:xfrm>
           <a:prstGeom prst="rect">
             <a:avLst/>
@@ -11574,28 +11353,28 @@
           <a:lstStyle/>
           <a:p>
             <a:pPr>
-              <a:defRPr sz="3600" b="1">
-                <a:solidFill>
-                  <a:srgbClr val="FFFFFF"/>
-                </a:solidFill>
-              </a:defRPr>
-            </a:pPr>
-            <a:r>
-              <a:t>7 · Node.js &amp; Mongoose preview</a:t>
-            </a:r>
-          </a:p>
-        </p:txBody>
-      </p:sp>
-      <p:sp>
-        <p:nvSpPr>
-          <p:cNvPr id="4" name="TextBox 3"/>
+              <a:defRPr sz="2800" b="1">
+                <a:solidFill>
+                  <a:srgbClr val="232B2B"/>
+                </a:solidFill>
+              </a:defRPr>
+            </a:pPr>
+            <a:r>
+              <a:t>Security essentials</a:t>
+            </a:r>
+          </a:p>
+        </p:txBody>
+      </p:sp>
+      <p:sp>
+        <p:nvSpPr>
+          <p:cNvPr id="3" name="TextBox 2"/>
           <p:cNvSpPr txBox="1"/>
           <p:nvPr/>
         </p:nvSpPr>
         <p:spPr>
           <a:xfrm>
-            <a:off x="731520" y="3657600"/>
-            <a:ext cx="3657600" cy="457200"/>
+            <a:off x="502920" y="1051560"/>
+            <a:ext cx="8229600" cy="4389120"/>
           </a:xfrm>
           <a:prstGeom prst="rect">
             <a:avLst/>
@@ -11603,20 +11382,83 @@
           <a:noFill/>
         </p:spPr>
         <p:txBody>
-          <a:bodyPr wrap="none">
+          <a:bodyPr wrap="square">
             <a:spAutoFit/>
           </a:bodyPr>
           <a:lstStyle/>
           <a:p>
             <a:pPr>
+              <a:spcAft>
+                <a:spcPts val="600"/>
+              </a:spcAft>
               <a:defRPr sz="1800">
                 <a:solidFill>
-                  <a:srgbClr val="00ED64"/>
-                </a:solidFill>
-              </a:defRPr>
-            </a:pPr>
-            <a:r>
-              <a:t>~8 minutes</a:t>
+                  <a:srgbClr val="232B2B"/>
+                </a:solidFill>
+              </a:defRPr>
+            </a:pPr>
+            <a:r>
+              <a:t>• Never expose MongoDB port directly to the internet without auth</a:t>
+            </a:r>
+          </a:p>
+          <a:p>
+            <a:pPr>
+              <a:spcAft>
+                <a:spcPts val="600"/>
+              </a:spcAft>
+              <a:defRPr sz="1800">
+                <a:solidFill>
+                  <a:srgbClr val="232B2B"/>
+                </a:solidFill>
+              </a:defRPr>
+            </a:pPr>
+            <a:r>
+              <a:t>• Store MONGO_URI in .env — not in Git</a:t>
+            </a:r>
+          </a:p>
+          <a:p>
+            <a:pPr>
+              <a:spcAft>
+                <a:spcPts val="600"/>
+              </a:spcAft>
+              <a:defRPr sz="1800">
+                <a:solidFill>
+                  <a:srgbClr val="232B2B"/>
+                </a:solidFill>
+              </a:defRPr>
+            </a:pPr>
+            <a:r>
+              <a:t>• Use least-privilege DB users (readWrite on one DB only)</a:t>
+            </a:r>
+          </a:p>
+          <a:p>
+            <a:pPr>
+              <a:spcAft>
+                <a:spcPts val="600"/>
+              </a:spcAft>
+              <a:defRPr sz="1800">
+                <a:solidFill>
+                  <a:srgbClr val="232B2B"/>
+                </a:solidFill>
+              </a:defRPr>
+            </a:pPr>
+            <a:r>
+              <a:t>• Validate &amp; sanitize input on Express before queries</a:t>
+            </a:r>
+          </a:p>
+          <a:p>
+            <a:pPr>
+              <a:spcAft>
+                <a:spcPts val="600"/>
+              </a:spcAft>
+              <a:defRPr sz="1800">
+                <a:solidFill>
+                  <a:srgbClr val="232B2B"/>
+                </a:solidFill>
+              </a:defRPr>
+            </a:pPr>
+            <a:r>
+              <a:t>• Beware NoSQL injection: treat user input as data, not query code</a:t>
             </a:r>
           </a:p>
         </p:txBody>
@@ -11648,14 +11490,14 @@
       </p:grpSpPr>
       <p:sp>
         <p:nvSpPr>
-          <p:cNvPr id="2" name="TextBox 1"/>
+          <p:cNvPr id="3" name="TextBox 2"/>
           <p:cNvSpPr txBox="1"/>
           <p:nvPr/>
         </p:nvSpPr>
         <p:spPr>
           <a:xfrm>
-            <a:off x="457200" y="320040"/>
-            <a:ext cx="8229600" cy="731520"/>
+            <a:off x="1711505" y="2834640"/>
+            <a:ext cx="5720990" cy="646331"/>
           </a:xfrm>
           <a:prstGeom prst="rect">
             <a:avLst/>
@@ -11669,97 +11511,19 @@
           <a:lstStyle/>
           <a:p>
             <a:pPr>
-              <a:defRPr sz="2800" b="1">
-                <a:solidFill>
-                  <a:srgbClr val="232B2B"/>
-                </a:solidFill>
-              </a:defRPr>
-            </a:pPr>
-            <a:r>
-              <a:t>Drivers vs Mongoose</a:t>
-            </a:r>
-          </a:p>
-        </p:txBody>
-      </p:sp>
-      <p:sp>
-        <p:nvSpPr>
-          <p:cNvPr id="3" name="TextBox 2"/>
-          <p:cNvSpPr txBox="1"/>
-          <p:nvPr/>
-        </p:nvSpPr>
-        <p:spPr>
-          <a:xfrm>
-            <a:off x="502920" y="1051560"/>
-            <a:ext cx="8229600" cy="4389120"/>
-          </a:xfrm>
-          <a:prstGeom prst="rect">
-            <a:avLst/>
-          </a:prstGeom>
-          <a:noFill/>
-        </p:spPr>
-        <p:txBody>
-          <a:bodyPr wrap="square">
-            <a:spAutoFit/>
-          </a:bodyPr>
-          <a:lstStyle/>
-          <a:p>
-            <a:pPr>
-              <a:spcAft>
-                <a:spcPts val="600"/>
-              </a:spcAft>
-              <a:defRPr sz="1800">
-                <a:solidFill>
-                  <a:srgbClr val="232B2B"/>
-                </a:solidFill>
-              </a:defRPr>
-            </a:pPr>
-            <a:r>
-              <a:t>• mongodb native driver — low-level, full control</a:t>
-            </a:r>
-          </a:p>
-          <a:p>
-            <a:pPr>
-              <a:spcAft>
-                <a:spcPts val="600"/>
-              </a:spcAft>
-              <a:defRPr sz="1800">
-                <a:solidFill>
-                  <a:srgbClr val="232B2B"/>
-                </a:solidFill>
-              </a:defRPr>
-            </a:pPr>
-            <a:r>
-              <a:t>• Mongoose — ODM (Object Document Mapper) on top of driver</a:t>
-            </a:r>
-          </a:p>
-          <a:p>
-            <a:pPr>
-              <a:spcAft>
-                <a:spcPts val="600"/>
-              </a:spcAft>
-              <a:defRPr sz="1800">
-                <a:solidFill>
-                  <a:srgbClr val="232B2B"/>
-                </a:solidFill>
-              </a:defRPr>
-            </a:pPr>
-            <a:r>
-              <a:t>• Mongoose: schemas, middleware, virtuals, populate</a:t>
-            </a:r>
-          </a:p>
-          <a:p>
-            <a:pPr>
-              <a:spcAft>
-                <a:spcPts val="600"/>
-              </a:spcAft>
-              <a:defRPr sz="1800">
-                <a:solidFill>
-                  <a:srgbClr val="232B2B"/>
-                </a:solidFill>
-              </a:defRPr>
-            </a:pPr>
-            <a:r>
-              <a:t>• Most MERN tutorials use Mongoose for Express APIs</a:t>
+              <a:defRPr sz="3600" b="1">
+                <a:solidFill>
+                  <a:srgbClr val="FFFFFF"/>
+                </a:solidFill>
+              </a:defRPr>
+            </a:pPr>
+            <a:r>
+              <a:rPr dirty="0">
+                <a:solidFill>
+                  <a:srgbClr val="002060"/>
+                </a:solidFill>
+              </a:rPr>
+              <a:t>8 · Best practices &amp; summary</a:t>
             </a:r>
           </a:p>
         </p:txBody>
@@ -11819,7 +11583,7 @@
               </a:defRPr>
             </a:pPr>
             <a:r>
-              <a:t>Mongoose quick sample</a:t>
+              <a:t>Best practices checklist</a:t>
             </a:r>
           </a:p>
         </p:txBody>
@@ -11833,7 +11597,7 @@
         <p:spPr>
           <a:xfrm>
             <a:off x="502920" y="1051560"/>
-            <a:ext cx="8229600" cy="2377440"/>
+            <a:ext cx="8229600" cy="4389120"/>
           </a:xfrm>
           <a:prstGeom prst="rect">
             <a:avLst/>
@@ -11846,192 +11610,83 @@
           </a:bodyPr>
           <a:lstStyle/>
           <a:p>
-            <a:endParaRPr/>
-          </a:p>
-        </p:txBody>
-      </p:sp>
-      <p:sp>
-        <p:nvSpPr>
-          <p:cNvPr id="4" name="TextBox 3"/>
-          <p:cNvSpPr txBox="1"/>
-          <p:nvPr/>
-        </p:nvSpPr>
-        <p:spPr>
-          <a:xfrm>
-            <a:off x="502920" y="3520440"/>
-            <a:ext cx="8229600" cy="2651760"/>
-          </a:xfrm>
-          <a:prstGeom prst="rect">
-            <a:avLst/>
-          </a:prstGeom>
-          <a:solidFill>
-            <a:srgbClr val="F4F4F4"/>
-          </a:solidFill>
-        </p:spPr>
-        <p:txBody>
-          <a:bodyPr wrap="square">
-            <a:spAutoFit/>
-          </a:bodyPr>
-          <a:lstStyle/>
-          <a:p>
-            <a:pPr>
-              <a:defRPr sz="1300">
-                <a:solidFill>
-                  <a:srgbClr val="232B2B"/>
-                </a:solidFill>
-                <a:latin typeface="Consolas"/>
-              </a:defRPr>
-            </a:pPr>
-            <a:r>
-              <a:t>import mongoose from "mongoose";</a:t>
-            </a:r>
-          </a:p>
-          <a:p>
-            <a:pPr>
-              <a:defRPr sz="1300">
-                <a:solidFill>
-                  <a:srgbClr val="232B2B"/>
-                </a:solidFill>
-                <a:latin typeface="Consolas"/>
-              </a:defRPr>
-            </a:pPr>
-            <a:endParaRPr/>
-          </a:p>
-          <a:p>
-            <a:pPr>
-              <a:defRPr sz="1300">
-                <a:solidFill>
-                  <a:srgbClr val="232B2B"/>
-                </a:solidFill>
-                <a:latin typeface="Consolas"/>
-              </a:defRPr>
-            </a:pPr>
-            <a:r>
-              <a:t>await mongoose.connect(process.env.MONGO_URI);</a:t>
-            </a:r>
-          </a:p>
-          <a:p>
-            <a:pPr>
-              <a:defRPr sz="1300">
-                <a:solidFill>
-                  <a:srgbClr val="232B2B"/>
-                </a:solidFill>
-                <a:latin typeface="Consolas"/>
-              </a:defRPr>
-            </a:pPr>
-            <a:endParaRPr/>
-          </a:p>
-          <a:p>
-            <a:pPr>
-              <a:defRPr sz="1300">
-                <a:solidFill>
-                  <a:srgbClr val="232B2B"/>
-                </a:solidFill>
-                <a:latin typeface="Consolas"/>
-              </a:defRPr>
-            </a:pPr>
-            <a:r>
-              <a:t>const productSchema = new mongoose.Schema({</a:t>
-            </a:r>
-          </a:p>
-          <a:p>
-            <a:pPr>
-              <a:defRPr sz="1300">
-                <a:solidFill>
-                  <a:srgbClr val="232B2B"/>
-                </a:solidFill>
-                <a:latin typeface="Consolas"/>
-              </a:defRPr>
-            </a:pPr>
-            <a:r>
-              <a:t>  title: { type: String, required: true },</a:t>
-            </a:r>
-          </a:p>
-          <a:p>
-            <a:pPr>
-              <a:defRPr sz="1300">
-                <a:solidFill>
-                  <a:srgbClr val="232B2B"/>
-                </a:solidFill>
-                <a:latin typeface="Consolas"/>
-              </a:defRPr>
-            </a:pPr>
-            <a:r>
-              <a:t>  price: { type: Number, min: 0 },</a:t>
-            </a:r>
-          </a:p>
-          <a:p>
-            <a:pPr>
-              <a:defRPr sz="1300">
-                <a:solidFill>
-                  <a:srgbClr val="232B2B"/>
-                </a:solidFill>
-                <a:latin typeface="Consolas"/>
-              </a:defRPr>
-            </a:pPr>
-            <a:r>
-              <a:t>  category: String,</a:t>
-            </a:r>
-          </a:p>
-          <a:p>
-            <a:pPr>
-              <a:defRPr sz="1300">
-                <a:solidFill>
-                  <a:srgbClr val="232B2B"/>
-                </a:solidFill>
-                <a:latin typeface="Consolas"/>
-              </a:defRPr>
-            </a:pPr>
-            <a:r>
-              <a:t>}, { timestamps: true });</a:t>
-            </a:r>
-          </a:p>
-          <a:p>
-            <a:pPr>
-              <a:defRPr sz="1300">
-                <a:solidFill>
-                  <a:srgbClr val="232B2B"/>
-                </a:solidFill>
-                <a:latin typeface="Consolas"/>
-              </a:defRPr>
-            </a:pPr>
-            <a:endParaRPr/>
-          </a:p>
-          <a:p>
-            <a:pPr>
-              <a:defRPr sz="1300">
-                <a:solidFill>
-                  <a:srgbClr val="232B2B"/>
-                </a:solidFill>
-                <a:latin typeface="Consolas"/>
-              </a:defRPr>
-            </a:pPr>
-            <a:r>
-              <a:t>const Product = mongoose.model("Product", productSchema);</a:t>
-            </a:r>
-          </a:p>
-          <a:p>
-            <a:pPr>
-              <a:defRPr sz="1300">
-                <a:solidFill>
-                  <a:srgbClr val="232B2B"/>
-                </a:solidFill>
-                <a:latin typeface="Consolas"/>
-              </a:defRPr>
-            </a:pPr>
-            <a:endParaRPr/>
-          </a:p>
-          <a:p>
-            <a:pPr>
-              <a:defRPr sz="1300">
-                <a:solidFill>
-                  <a:srgbClr val="232B2B"/>
-                </a:solidFill>
-                <a:latin typeface="Consolas"/>
-              </a:defRPr>
-            </a:pPr>
-            <a:r>
-              <a:t>const products = await Product.find({ category: "phones" });</a:t>
+            <a:pPr>
+              <a:spcAft>
+                <a:spcPts val="600"/>
+              </a:spcAft>
+              <a:defRPr sz="1800">
+                <a:solidFill>
+                  <a:srgbClr val="232B2B"/>
+                </a:solidFill>
+              </a:defRPr>
+            </a:pPr>
+            <a:r>
+              <a:rPr dirty="0"/>
+              <a:t>• Design schema for how you query (not how you store in SQL habit)</a:t>
+            </a:r>
+          </a:p>
+          <a:p>
+            <a:pPr>
+              <a:spcAft>
+                <a:spcPts val="600"/>
+              </a:spcAft>
+              <a:defRPr sz="1800">
+                <a:solidFill>
+                  <a:srgbClr val="232B2B"/>
+                </a:solidFill>
+              </a:defRPr>
+            </a:pPr>
+            <a:r>
+              <a:rPr dirty="0"/>
+              <a:t>• Index fields you filter and sort on</a:t>
+            </a:r>
+          </a:p>
+          <a:p>
+            <a:pPr>
+              <a:spcAft>
+                <a:spcPts val="600"/>
+              </a:spcAft>
+              <a:defRPr sz="1800">
+                <a:solidFill>
+                  <a:srgbClr val="232B2B"/>
+                </a:solidFill>
+              </a:defRPr>
+            </a:pPr>
+            <a:r>
+              <a:rPr dirty="0"/>
+              <a:t>• Use pagination: .limit() + .skip() or cursor-based (_id &gt; last)</a:t>
+            </a:r>
+          </a:p>
+          <a:p>
+            <a:pPr>
+              <a:spcAft>
+                <a:spcPts val="600"/>
+              </a:spcAft>
+              <a:defRPr sz="1800">
+                <a:solidFill>
+                  <a:srgbClr val="232B2B"/>
+                </a:solidFill>
+              </a:defRPr>
+            </a:pPr>
+            <a:r>
+              <a:rPr dirty="0"/>
+              <a:t>• Back up Atlas clusters; test restore once</a:t>
+            </a:r>
+          </a:p>
+          <a:p>
+            <a:pPr>
+              <a:spcAft>
+                <a:spcPts val="600"/>
+              </a:spcAft>
+              <a:defRPr sz="1800">
+                <a:solidFill>
+                  <a:srgbClr val="232B2B"/>
+                </a:solidFill>
+              </a:defRPr>
+            </a:pPr>
+            <a:r>
+              <a:rPr dirty="0"/>
+              <a:t>• Use meaningful field names; avoid deep nesting (&gt;3 levels)</a:t>
             </a:r>
           </a:p>
         </p:txBody>
@@ -12091,7 +11746,7 @@
               </a:defRPr>
             </a:pPr>
             <a:r>
-              <a:t>Express API sketch (coming soon)</a:t>
+              <a:t>Common mistakes beginners make</a:t>
             </a:r>
           </a:p>
         </p:txBody>
@@ -12105,7 +11760,7 @@
         <p:spPr>
           <a:xfrm>
             <a:off x="502920" y="1051560"/>
-            <a:ext cx="8229600" cy="2377440"/>
+            <a:ext cx="8229600" cy="4389120"/>
           </a:xfrm>
           <a:prstGeom prst="rect">
             <a:avLst/>
@@ -12118,148 +11773,91 @@
           </a:bodyPr>
           <a:lstStyle/>
           <a:p>
-            <a:endParaRPr/>
-          </a:p>
-        </p:txBody>
-      </p:sp>
-      <p:sp>
-        <p:nvSpPr>
-          <p:cNvPr id="4" name="TextBox 3"/>
-          <p:cNvSpPr txBox="1"/>
-          <p:nvPr/>
-        </p:nvSpPr>
-        <p:spPr>
-          <a:xfrm>
-            <a:off x="502920" y="3520440"/>
-            <a:ext cx="8229600" cy="2651760"/>
-          </a:xfrm>
-          <a:prstGeom prst="rect">
-            <a:avLst/>
-          </a:prstGeom>
-          <a:solidFill>
-            <a:srgbClr val="F4F4F4"/>
-          </a:solidFill>
-        </p:spPr>
-        <p:txBody>
-          <a:bodyPr wrap="square">
-            <a:spAutoFit/>
-          </a:bodyPr>
-          <a:lstStyle/>
-          <a:p>
-            <a:pPr>
-              <a:defRPr sz="1300">
-                <a:solidFill>
-                  <a:srgbClr val="232B2B"/>
-                </a:solidFill>
-                <a:latin typeface="Consolas"/>
-              </a:defRPr>
-            </a:pPr>
-            <a:r>
-              <a:t>// GET /api/products</a:t>
-            </a:r>
-          </a:p>
-          <a:p>
-            <a:pPr>
-              <a:defRPr sz="1300">
-                <a:solidFill>
-                  <a:srgbClr val="232B2B"/>
-                </a:solidFill>
-                <a:latin typeface="Consolas"/>
-              </a:defRPr>
-            </a:pPr>
-            <a:r>
-              <a:t>app.get("/api/products", async (req, res) =&gt; {</a:t>
-            </a:r>
-          </a:p>
-          <a:p>
-            <a:pPr>
-              <a:defRPr sz="1300">
-                <a:solidFill>
-                  <a:srgbClr val="232B2B"/>
-                </a:solidFill>
-                <a:latin typeface="Consolas"/>
-              </a:defRPr>
-            </a:pPr>
-            <a:r>
-              <a:t>  try {</a:t>
-            </a:r>
-          </a:p>
-          <a:p>
-            <a:pPr>
-              <a:defRPr sz="1300">
-                <a:solidFill>
-                  <a:srgbClr val="232B2B"/>
-                </a:solidFill>
-                <a:latin typeface="Consolas"/>
-              </a:defRPr>
-            </a:pPr>
-            <a:r>
-              <a:t>    const products = await Product.find();</a:t>
-            </a:r>
-          </a:p>
-          <a:p>
-            <a:pPr>
-              <a:defRPr sz="1300">
-                <a:solidFill>
-                  <a:srgbClr val="232B2B"/>
-                </a:solidFill>
-                <a:latin typeface="Consolas"/>
-              </a:defRPr>
-            </a:pPr>
-            <a:r>
-              <a:t>    res.json(products);</a:t>
-            </a:r>
-          </a:p>
-          <a:p>
-            <a:pPr>
-              <a:defRPr sz="1300">
-                <a:solidFill>
-                  <a:srgbClr val="232B2B"/>
-                </a:solidFill>
-                <a:latin typeface="Consolas"/>
-              </a:defRPr>
-            </a:pPr>
-            <a:r>
-              <a:t>  } catch (err) {</a:t>
-            </a:r>
-          </a:p>
-          <a:p>
-            <a:pPr>
-              <a:defRPr sz="1300">
-                <a:solidFill>
-                  <a:srgbClr val="232B2B"/>
-                </a:solidFill>
-                <a:latin typeface="Consolas"/>
-              </a:defRPr>
-            </a:pPr>
-            <a:r>
-              <a:t>    res.status(500).json({ message: err.message });</a:t>
-            </a:r>
-          </a:p>
-          <a:p>
-            <a:pPr>
-              <a:defRPr sz="1300">
-                <a:solidFill>
-                  <a:srgbClr val="232B2B"/>
-                </a:solidFill>
-                <a:latin typeface="Consolas"/>
-              </a:defRPr>
-            </a:pPr>
-            <a:r>
-              <a:t>  }</a:t>
-            </a:r>
-          </a:p>
-          <a:p>
-            <a:pPr>
-              <a:defRPr sz="1300">
-                <a:solidFill>
-                  <a:srgbClr val="232B2B"/>
-                </a:solidFill>
-                <a:latin typeface="Consolas"/>
-              </a:defRPr>
-            </a:pPr>
-            <a:r>
-              <a:t>});</a:t>
+            <a:pPr>
+              <a:spcAft>
+                <a:spcPts val="600"/>
+              </a:spcAft>
+              <a:defRPr sz="1800">
+                <a:solidFill>
+                  <a:srgbClr val="232B2B"/>
+                </a:solidFill>
+              </a:defRPr>
+            </a:pPr>
+            <a:r>
+              <a:rPr dirty="0"/>
+              <a:t>• Forgetting $set in updates</a:t>
+            </a:r>
+          </a:p>
+          <a:p>
+            <a:pPr>
+              <a:spcAft>
+                <a:spcPts val="600"/>
+              </a:spcAft>
+              <a:defRPr sz="1800">
+                <a:solidFill>
+                  <a:srgbClr val="232B2B"/>
+                </a:solidFill>
+              </a:defRPr>
+            </a:pPr>
+            <a:r>
+              <a:rPr dirty="0"/>
+              <a:t>• Querying without limits on large collections</a:t>
+            </a:r>
+          </a:p>
+          <a:p>
+            <a:pPr>
+              <a:spcAft>
+                <a:spcPts val="600"/>
+              </a:spcAft>
+              <a:defRPr sz="1800">
+                <a:solidFill>
+                  <a:srgbClr val="232B2B"/>
+                </a:solidFill>
+              </a:defRPr>
+            </a:pPr>
+            <a:r>
+              <a:rPr dirty="0"/>
+              <a:t>• Storing passwords in plain text (always hash in Express!)</a:t>
+            </a:r>
+          </a:p>
+          <a:p>
+            <a:pPr>
+              <a:spcAft>
+                <a:spcPts val="600"/>
+              </a:spcAft>
+              <a:defRPr sz="1800">
+                <a:solidFill>
+                  <a:srgbClr val="232B2B"/>
+                </a:solidFill>
+              </a:defRPr>
+            </a:pPr>
+            <a:r>
+              <a:rPr dirty="0"/>
+              <a:t>• Creating a new connection per request (reuse one pool)</a:t>
+            </a:r>
+          </a:p>
+          <a:p>
+            <a:pPr>
+              <a:spcAft>
+                <a:spcPts val="600"/>
+              </a:spcAft>
+              <a:defRPr sz="1800">
+                <a:solidFill>
+                  <a:srgbClr val="232B2B"/>
+                </a:solidFill>
+              </a:defRPr>
+            </a:pPr>
+            <a:r>
+              <a:rPr dirty="0"/>
+              <a:t>• Mixing string _id with </a:t>
+            </a:r>
+            <a:r>
+              <a:rPr dirty="0" err="1"/>
+              <a:t>ObjectId</a:t>
+            </a:r>
+            <a:r>
+              <a:rPr dirty="0"/>
+              <a:t> in filters</a:t>
             </a:r>
           </a:p>
         </p:txBody>
@@ -12462,7 +12060,7 @@
               </a:defRPr>
             </a:pPr>
             <a:r>
-              <a:t>Security essentials</a:t>
+              <a:t>Lab / homework preview</a:t>
             </a:r>
           </a:p>
         </p:txBody>
@@ -12476,7 +12074,7 @@
         <p:spPr>
           <a:xfrm>
             <a:off x="502920" y="1051560"/>
-            <a:ext cx="8229600" cy="4389120"/>
+            <a:ext cx="8229600" cy="1431161"/>
           </a:xfrm>
           <a:prstGeom prst="rect">
             <a:avLst/>
@@ -12500,8 +12098,14 @@
               </a:defRPr>
             </a:pPr>
             <a:r>
-              <a:t>• Never expose MongoDB port directly to the internet without auth</a:t>
-            </a:r>
+              <a:rPr dirty="0"/>
+              <a:t>• Install Compass or use Atlas; create </a:t>
+            </a:r>
+            <a:r>
+              <a:rPr dirty="0" err="1"/>
+              <a:t>shop_db</a:t>
+            </a:r>
+            <a:endParaRPr dirty="0"/>
           </a:p>
           <a:p>
             <a:pPr>
@@ -12515,7 +12119,8 @@
               </a:defRPr>
             </a:pPr>
             <a:r>
-              <a:t>• Store MONGO_URI in .env — not in Git</a:t>
+              <a:rPr dirty="0"/>
+              <a:t>• Seed products collection (5+ documents)</a:t>
             </a:r>
           </a:p>
           <a:p>
@@ -12530,7 +12135,16 @@
               </a:defRPr>
             </a:pPr>
             <a:r>
-              <a:t>• Use least-privilege DB users (readWrite on one DB only)</a:t>
+              <a:rPr dirty="0"/>
+              <a:t>• Practice CRUD + 3 queries using $</a:t>
+            </a:r>
+            <a:r>
+              <a:rPr dirty="0" err="1"/>
+              <a:t>gt</a:t>
+            </a:r>
+            <a:r>
+              <a:rPr dirty="0"/>
+              <a:t>, $in, $or</a:t>
             </a:r>
           </a:p>
           <a:p>
@@ -12545,22 +12159,8 @@
               </a:defRPr>
             </a:pPr>
             <a:r>
-              <a:t>• Validate &amp; sanitize input on Express before queries</a:t>
-            </a:r>
-          </a:p>
-          <a:p>
-            <a:pPr>
-              <a:spcAft>
-                <a:spcPts val="600"/>
-              </a:spcAft>
-              <a:defRPr sz="1800">
-                <a:solidFill>
-                  <a:srgbClr val="232B2B"/>
-                </a:solidFill>
-              </a:defRPr>
-            </a:pPr>
-            <a:r>
-              <a:t>• Beware NoSQL injection: treat user input as data, not query code</a:t>
+              <a:rPr dirty="0"/>
+              <a:t>• Create one compound index; run explain()</a:t>
             </a:r>
           </a:p>
         </p:txBody>
@@ -12592,145 +12192,6 @@
       </p:grpSpPr>
       <p:sp>
         <p:nvSpPr>
-          <p:cNvPr id="2" name="Rectangle 1"/>
-          <p:cNvSpPr/>
-          <p:nvPr/>
-        </p:nvSpPr>
-        <p:spPr>
-          <a:xfrm>
-            <a:off x="0" y="2560320"/>
-            <a:ext cx="9144000" cy="2011680"/>
-          </a:xfrm>
-          <a:prstGeom prst="rect">
-            <a:avLst/>
-          </a:prstGeom>
-          <a:solidFill>
-            <a:srgbClr val="232B2B"/>
-          </a:solidFill>
-          <a:ln>
-            <a:noFill/>
-          </a:ln>
-        </p:spPr>
-        <p:style>
-          <a:lnRef idx="1">
-            <a:schemeClr val="accent1"/>
-          </a:lnRef>
-          <a:fillRef idx="3">
-            <a:schemeClr val="accent1"/>
-          </a:fillRef>
-          <a:effectRef idx="2">
-            <a:schemeClr val="accent1"/>
-          </a:effectRef>
-          <a:fontRef idx="minor">
-            <a:schemeClr val="lt1"/>
-          </a:fontRef>
-        </p:style>
-        <p:txBody>
-          <a:bodyPr rtlCol="0" anchor="ctr"/>
-          <a:lstStyle/>
-          <a:p>
-            <a:pPr algn="ctr"/>
-            <a:endParaRPr/>
-          </a:p>
-        </p:txBody>
-      </p:sp>
-      <p:sp>
-        <p:nvSpPr>
-          <p:cNvPr id="3" name="TextBox 2"/>
-          <p:cNvSpPr txBox="1"/>
-          <p:nvPr/>
-        </p:nvSpPr>
-        <p:spPr>
-          <a:xfrm>
-            <a:off x="731520" y="2834640"/>
-            <a:ext cx="7680960" cy="1097280"/>
-          </a:xfrm>
-          <a:prstGeom prst="rect">
-            <a:avLst/>
-          </a:prstGeom>
-          <a:noFill/>
-        </p:spPr>
-        <p:txBody>
-          <a:bodyPr wrap="none">
-            <a:spAutoFit/>
-          </a:bodyPr>
-          <a:lstStyle/>
-          <a:p>
-            <a:pPr>
-              <a:defRPr sz="3600" b="1">
-                <a:solidFill>
-                  <a:srgbClr val="FFFFFF"/>
-                </a:solidFill>
-              </a:defRPr>
-            </a:pPr>
-            <a:r>
-              <a:t>8 · Best practices &amp; summary</a:t>
-            </a:r>
-          </a:p>
-        </p:txBody>
-      </p:sp>
-      <p:sp>
-        <p:nvSpPr>
-          <p:cNvPr id="4" name="TextBox 3"/>
-          <p:cNvSpPr txBox="1"/>
-          <p:nvPr/>
-        </p:nvSpPr>
-        <p:spPr>
-          <a:xfrm>
-            <a:off x="731520" y="3657600"/>
-            <a:ext cx="3657600" cy="457200"/>
-          </a:xfrm>
-          <a:prstGeom prst="rect">
-            <a:avLst/>
-          </a:prstGeom>
-          <a:noFill/>
-        </p:spPr>
-        <p:txBody>
-          <a:bodyPr wrap="none">
-            <a:spAutoFit/>
-          </a:bodyPr>
-          <a:lstStyle/>
-          <a:p>
-            <a:pPr>
-              <a:defRPr sz="1800">
-                <a:solidFill>
-                  <a:srgbClr val="00ED64"/>
-                </a:solidFill>
-              </a:defRPr>
-            </a:pPr>
-            <a:r>
-              <a:t>~8 minutes</a:t>
-            </a:r>
-          </a:p>
-        </p:txBody>
-      </p:sp>
-    </p:spTree>
-  </p:cSld>
-  <p:clrMapOvr>
-    <a:masterClrMapping/>
-  </p:clrMapOvr>
-</p:sld>
-</file>
-
-<file path=ppt/slides/slide42.xml><?xml version="1.0" encoding="utf-8"?>
-<p:sld xmlns:a="http://schemas.openxmlformats.org/drawingml/2006/main" xmlns:r="http://schemas.openxmlformats.org/officeDocument/2006/relationships" xmlns:p="http://schemas.openxmlformats.org/presentationml/2006/main">
-  <p:cSld>
-    <p:spTree>
-      <p:nvGrpSpPr>
-        <p:cNvPr id="1" name=""/>
-        <p:cNvGrpSpPr/>
-        <p:nvPr/>
-      </p:nvGrpSpPr>
-      <p:grpSpPr>
-        <a:xfrm>
-          <a:off x="0" y="0"/>
-          <a:ext cx="0" cy="0"/>
-          <a:chOff x="0" y="0"/>
-          <a:chExt cx="0" cy="0"/>
-        </a:xfrm>
-      </p:grpSpPr>
-      <p:sp>
-        <p:nvSpPr>
           <p:cNvPr id="2" name="TextBox 1"/>
           <p:cNvSpPr txBox="1"/>
           <p:nvPr/>
@@ -12759,7 +12220,7 @@
               </a:defRPr>
             </a:pPr>
             <a:r>
-              <a:t>Best practices checklist</a:t>
+              <a:t>Key takeaways</a:t>
             </a:r>
           </a:p>
         </p:txBody>
@@ -12772,7 +12233,7 @@
         </p:nvSpPr>
         <p:spPr>
           <a:xfrm>
-            <a:off x="502920" y="1051560"/>
+            <a:off x="485502" y="1051560"/>
             <a:ext cx="8229600" cy="4389120"/>
           </a:xfrm>
           <a:prstGeom prst="rect">
@@ -12797,7 +12258,7 @@
               </a:defRPr>
             </a:pPr>
             <a:r>
-              <a:t>• Design schema for how you query (not how you store in SQL habit)</a:t>
+              <a:t>• MongoDB stores flexible JSON-like documents in collections</a:t>
             </a:r>
           </a:p>
           <a:p>
@@ -12812,7 +12273,7 @@
               </a:defRPr>
             </a:pPr>
             <a:r>
-              <a:t>• Index fields you filter and sort on</a:t>
+              <a:t>• CRUD: insert/find/update/delete with operators ($set, $gt, …)</a:t>
             </a:r>
           </a:p>
           <a:p>
@@ -12827,7 +12288,7 @@
               </a:defRPr>
             </a:pPr>
             <a:r>
-              <a:t>• Use pagination: .limit() + .skip() or cursor-based (_id &gt; last)</a:t>
+              <a:t>• Schema is flexible — you design embed vs reference</a:t>
             </a:r>
           </a:p>
           <a:p>
@@ -12842,7 +12303,7 @@
               </a:defRPr>
             </a:pPr>
             <a:r>
-              <a:t>• Back up Atlas clusters; test restore once</a:t>
+              <a:t>• Indexes speed queries; validation protects data quality</a:t>
             </a:r>
           </a:p>
           <a:p>
@@ -12857,7 +12318,7 @@
               </a:defRPr>
             </a:pPr>
             <a:r>
-              <a:t>• Use meaningful field names; avoid deep nesting (&gt;3 levels)</a:t>
+              <a:t>• MERN: Express + Mongoose will replace DummyJSON for real persistence</a:t>
             </a:r>
           </a:p>
         </p:txBody>
@@ -12870,481 +12331,7 @@
 </p:sld>
 </file>
 
-<file path=ppt/slides/slide43.xml><?xml version="1.0" encoding="utf-8"?>
-<p:sld xmlns:a="http://schemas.openxmlformats.org/drawingml/2006/main" xmlns:r="http://schemas.openxmlformats.org/officeDocument/2006/relationships" xmlns:p="http://schemas.openxmlformats.org/presentationml/2006/main">
-  <p:cSld>
-    <p:spTree>
-      <p:nvGrpSpPr>
-        <p:cNvPr id="1" name=""/>
-        <p:cNvGrpSpPr/>
-        <p:nvPr/>
-      </p:nvGrpSpPr>
-      <p:grpSpPr>
-        <a:xfrm>
-          <a:off x="0" y="0"/>
-          <a:ext cx="0" cy="0"/>
-          <a:chOff x="0" y="0"/>
-          <a:chExt cx="0" cy="0"/>
-        </a:xfrm>
-      </p:grpSpPr>
-      <p:sp>
-        <p:nvSpPr>
-          <p:cNvPr id="2" name="TextBox 1"/>
-          <p:cNvSpPr txBox="1"/>
-          <p:nvPr/>
-        </p:nvSpPr>
-        <p:spPr>
-          <a:xfrm>
-            <a:off x="457200" y="320040"/>
-            <a:ext cx="8229600" cy="731520"/>
-          </a:xfrm>
-          <a:prstGeom prst="rect">
-            <a:avLst/>
-          </a:prstGeom>
-          <a:noFill/>
-        </p:spPr>
-        <p:txBody>
-          <a:bodyPr wrap="none">
-            <a:spAutoFit/>
-          </a:bodyPr>
-          <a:lstStyle/>
-          <a:p>
-            <a:pPr>
-              <a:defRPr sz="2800" b="1">
-                <a:solidFill>
-                  <a:srgbClr val="232B2B"/>
-                </a:solidFill>
-              </a:defRPr>
-            </a:pPr>
-            <a:r>
-              <a:t>Common mistakes beginners make</a:t>
-            </a:r>
-          </a:p>
-        </p:txBody>
-      </p:sp>
-      <p:sp>
-        <p:nvSpPr>
-          <p:cNvPr id="3" name="TextBox 2"/>
-          <p:cNvSpPr txBox="1"/>
-          <p:nvPr/>
-        </p:nvSpPr>
-        <p:spPr>
-          <a:xfrm>
-            <a:off x="502920" y="1051560"/>
-            <a:ext cx="8229600" cy="4389120"/>
-          </a:xfrm>
-          <a:prstGeom prst="rect">
-            <a:avLst/>
-          </a:prstGeom>
-          <a:noFill/>
-        </p:spPr>
-        <p:txBody>
-          <a:bodyPr wrap="square">
-            <a:spAutoFit/>
-          </a:bodyPr>
-          <a:lstStyle/>
-          <a:p>
-            <a:pPr>
-              <a:spcAft>
-                <a:spcPts val="600"/>
-              </a:spcAft>
-              <a:defRPr sz="1800">
-                <a:solidFill>
-                  <a:srgbClr val="232B2B"/>
-                </a:solidFill>
-              </a:defRPr>
-            </a:pPr>
-            <a:r>
-              <a:t>• Forgetting $set in updates</a:t>
-            </a:r>
-          </a:p>
-          <a:p>
-            <a:pPr>
-              <a:spcAft>
-                <a:spcPts val="600"/>
-              </a:spcAft>
-              <a:defRPr sz="1800">
-                <a:solidFill>
-                  <a:srgbClr val="232B2B"/>
-                </a:solidFill>
-              </a:defRPr>
-            </a:pPr>
-            <a:r>
-              <a:t>• Querying without limits on large collections</a:t>
-            </a:r>
-          </a:p>
-          <a:p>
-            <a:pPr>
-              <a:spcAft>
-                <a:spcPts val="600"/>
-              </a:spcAft>
-              <a:defRPr sz="1800">
-                <a:solidFill>
-                  <a:srgbClr val="232B2B"/>
-                </a:solidFill>
-              </a:defRPr>
-            </a:pPr>
-            <a:r>
-              <a:t>• Storing passwords in plain text (always hash in Express!)</a:t>
-            </a:r>
-          </a:p>
-          <a:p>
-            <a:pPr>
-              <a:spcAft>
-                <a:spcPts val="600"/>
-              </a:spcAft>
-              <a:defRPr sz="1800">
-                <a:solidFill>
-                  <a:srgbClr val="232B2B"/>
-                </a:solidFill>
-              </a:defRPr>
-            </a:pPr>
-            <a:r>
-              <a:t>• Creating a new connection per request (reuse one pool)</a:t>
-            </a:r>
-          </a:p>
-          <a:p>
-            <a:pPr>
-              <a:spcAft>
-                <a:spcPts val="600"/>
-              </a:spcAft>
-              <a:defRPr sz="1800">
-                <a:solidFill>
-                  <a:srgbClr val="232B2B"/>
-                </a:solidFill>
-              </a:defRPr>
-            </a:pPr>
-            <a:r>
-              <a:t>• Mixing string _id with ObjectId in filters</a:t>
-            </a:r>
-          </a:p>
-        </p:txBody>
-      </p:sp>
-    </p:spTree>
-  </p:cSld>
-  <p:clrMapOvr>
-    <a:masterClrMapping/>
-  </p:clrMapOvr>
-</p:sld>
-</file>
-
-<file path=ppt/slides/slide44.xml><?xml version="1.0" encoding="utf-8"?>
-<p:sld xmlns:a="http://schemas.openxmlformats.org/drawingml/2006/main" xmlns:r="http://schemas.openxmlformats.org/officeDocument/2006/relationships" xmlns:p="http://schemas.openxmlformats.org/presentationml/2006/main">
-  <p:cSld>
-    <p:spTree>
-      <p:nvGrpSpPr>
-        <p:cNvPr id="1" name=""/>
-        <p:cNvGrpSpPr/>
-        <p:nvPr/>
-      </p:nvGrpSpPr>
-      <p:grpSpPr>
-        <a:xfrm>
-          <a:off x="0" y="0"/>
-          <a:ext cx="0" cy="0"/>
-          <a:chOff x="0" y="0"/>
-          <a:chExt cx="0" cy="0"/>
-        </a:xfrm>
-      </p:grpSpPr>
-      <p:sp>
-        <p:nvSpPr>
-          <p:cNvPr id="2" name="TextBox 1"/>
-          <p:cNvSpPr txBox="1"/>
-          <p:nvPr/>
-        </p:nvSpPr>
-        <p:spPr>
-          <a:xfrm>
-            <a:off x="457200" y="320040"/>
-            <a:ext cx="8229600" cy="731520"/>
-          </a:xfrm>
-          <a:prstGeom prst="rect">
-            <a:avLst/>
-          </a:prstGeom>
-          <a:noFill/>
-        </p:spPr>
-        <p:txBody>
-          <a:bodyPr wrap="none">
-            <a:spAutoFit/>
-          </a:bodyPr>
-          <a:lstStyle/>
-          <a:p>
-            <a:pPr>
-              <a:defRPr sz="2800" b="1">
-                <a:solidFill>
-                  <a:srgbClr val="232B2B"/>
-                </a:solidFill>
-              </a:defRPr>
-            </a:pPr>
-            <a:r>
-              <a:t>Lab / homework preview</a:t>
-            </a:r>
-          </a:p>
-        </p:txBody>
-      </p:sp>
-      <p:sp>
-        <p:nvSpPr>
-          <p:cNvPr id="3" name="TextBox 2"/>
-          <p:cNvSpPr txBox="1"/>
-          <p:nvPr/>
-        </p:nvSpPr>
-        <p:spPr>
-          <a:xfrm>
-            <a:off x="502920" y="1051560"/>
-            <a:ext cx="8229600" cy="4389120"/>
-          </a:xfrm>
-          <a:prstGeom prst="rect">
-            <a:avLst/>
-          </a:prstGeom>
-          <a:noFill/>
-        </p:spPr>
-        <p:txBody>
-          <a:bodyPr wrap="square">
-            <a:spAutoFit/>
-          </a:bodyPr>
-          <a:lstStyle/>
-          <a:p>
-            <a:pPr>
-              <a:spcAft>
-                <a:spcPts val="600"/>
-              </a:spcAft>
-              <a:defRPr sz="1800">
-                <a:solidFill>
-                  <a:srgbClr val="232B2B"/>
-                </a:solidFill>
-              </a:defRPr>
-            </a:pPr>
-            <a:r>
-              <a:t>• Install Compass or use Atlas; create shop_db</a:t>
-            </a:r>
-          </a:p>
-          <a:p>
-            <a:pPr>
-              <a:spcAft>
-                <a:spcPts val="600"/>
-              </a:spcAft>
-              <a:defRPr sz="1800">
-                <a:solidFill>
-                  <a:srgbClr val="232B2B"/>
-                </a:solidFill>
-              </a:defRPr>
-            </a:pPr>
-            <a:r>
-              <a:t>• Seed products collection (5+ documents)</a:t>
-            </a:r>
-          </a:p>
-          <a:p>
-            <a:pPr>
-              <a:spcAft>
-                <a:spcPts val="600"/>
-              </a:spcAft>
-              <a:defRPr sz="1800">
-                <a:solidFill>
-                  <a:srgbClr val="232B2B"/>
-                </a:solidFill>
-              </a:defRPr>
-            </a:pPr>
-            <a:r>
-              <a:t>• Practice CRUD + 3 queries using $gt, $in, $or</a:t>
-            </a:r>
-          </a:p>
-          <a:p>
-            <a:pPr>
-              <a:spcAft>
-                <a:spcPts val="600"/>
-              </a:spcAft>
-              <a:defRPr sz="1800">
-                <a:solidFill>
-                  <a:srgbClr val="232B2B"/>
-                </a:solidFill>
-              </a:defRPr>
-            </a:pPr>
-            <a:r>
-              <a:t>• Create one compound index; run explain()</a:t>
-            </a:r>
-          </a:p>
-          <a:p>
-            <a:pPr>
-              <a:spcAft>
-                <a:spcPts val="600"/>
-              </a:spcAft>
-              <a:defRPr sz="1800">
-                <a:solidFill>
-                  <a:srgbClr val="232B2B"/>
-                </a:solidFill>
-              </a:defRPr>
-            </a:pPr>
-            <a:r>
-              <a:t>• Optional: read Mongoose connect docs for next class</a:t>
-            </a:r>
-          </a:p>
-        </p:txBody>
-      </p:sp>
-    </p:spTree>
-  </p:cSld>
-  <p:clrMapOvr>
-    <a:masterClrMapping/>
-  </p:clrMapOvr>
-</p:sld>
-</file>
-
-<file path=ppt/slides/slide45.xml><?xml version="1.0" encoding="utf-8"?>
-<p:sld xmlns:a="http://schemas.openxmlformats.org/drawingml/2006/main" xmlns:r="http://schemas.openxmlformats.org/officeDocument/2006/relationships" xmlns:p="http://schemas.openxmlformats.org/presentationml/2006/main">
-  <p:cSld>
-    <p:spTree>
-      <p:nvGrpSpPr>
-        <p:cNvPr id="1" name=""/>
-        <p:cNvGrpSpPr/>
-        <p:nvPr/>
-      </p:nvGrpSpPr>
-      <p:grpSpPr>
-        <a:xfrm>
-          <a:off x="0" y="0"/>
-          <a:ext cx="0" cy="0"/>
-          <a:chOff x="0" y="0"/>
-          <a:chExt cx="0" cy="0"/>
-        </a:xfrm>
-      </p:grpSpPr>
-      <p:sp>
-        <p:nvSpPr>
-          <p:cNvPr id="2" name="TextBox 1"/>
-          <p:cNvSpPr txBox="1"/>
-          <p:nvPr/>
-        </p:nvSpPr>
-        <p:spPr>
-          <a:xfrm>
-            <a:off x="457200" y="320040"/>
-            <a:ext cx="8229600" cy="731520"/>
-          </a:xfrm>
-          <a:prstGeom prst="rect">
-            <a:avLst/>
-          </a:prstGeom>
-          <a:noFill/>
-        </p:spPr>
-        <p:txBody>
-          <a:bodyPr wrap="none">
-            <a:spAutoFit/>
-          </a:bodyPr>
-          <a:lstStyle/>
-          <a:p>
-            <a:pPr>
-              <a:defRPr sz="2800" b="1">
-                <a:solidFill>
-                  <a:srgbClr val="232B2B"/>
-                </a:solidFill>
-              </a:defRPr>
-            </a:pPr>
-            <a:r>
-              <a:t>Key takeaways</a:t>
-            </a:r>
-          </a:p>
-        </p:txBody>
-      </p:sp>
-      <p:sp>
-        <p:nvSpPr>
-          <p:cNvPr id="3" name="TextBox 2"/>
-          <p:cNvSpPr txBox="1"/>
-          <p:nvPr/>
-        </p:nvSpPr>
-        <p:spPr>
-          <a:xfrm>
-            <a:off x="502920" y="1051560"/>
-            <a:ext cx="8229600" cy="4389120"/>
-          </a:xfrm>
-          <a:prstGeom prst="rect">
-            <a:avLst/>
-          </a:prstGeom>
-          <a:noFill/>
-        </p:spPr>
-        <p:txBody>
-          <a:bodyPr wrap="square">
-            <a:spAutoFit/>
-          </a:bodyPr>
-          <a:lstStyle/>
-          <a:p>
-            <a:pPr>
-              <a:spcAft>
-                <a:spcPts val="600"/>
-              </a:spcAft>
-              <a:defRPr sz="1800">
-                <a:solidFill>
-                  <a:srgbClr val="232B2B"/>
-                </a:solidFill>
-              </a:defRPr>
-            </a:pPr>
-            <a:r>
-              <a:t>• MongoDB stores flexible JSON-like documents in collections</a:t>
-            </a:r>
-          </a:p>
-          <a:p>
-            <a:pPr>
-              <a:spcAft>
-                <a:spcPts val="600"/>
-              </a:spcAft>
-              <a:defRPr sz="1800">
-                <a:solidFill>
-                  <a:srgbClr val="232B2B"/>
-                </a:solidFill>
-              </a:defRPr>
-            </a:pPr>
-            <a:r>
-              <a:t>• CRUD: insert/find/update/delete with operators ($set, $gt, …)</a:t>
-            </a:r>
-          </a:p>
-          <a:p>
-            <a:pPr>
-              <a:spcAft>
-                <a:spcPts val="600"/>
-              </a:spcAft>
-              <a:defRPr sz="1800">
-                <a:solidFill>
-                  <a:srgbClr val="232B2B"/>
-                </a:solidFill>
-              </a:defRPr>
-            </a:pPr>
-            <a:r>
-              <a:t>• Schema is flexible — you design embed vs reference</a:t>
-            </a:r>
-          </a:p>
-          <a:p>
-            <a:pPr>
-              <a:spcAft>
-                <a:spcPts val="600"/>
-              </a:spcAft>
-              <a:defRPr sz="1800">
-                <a:solidFill>
-                  <a:srgbClr val="232B2B"/>
-                </a:solidFill>
-              </a:defRPr>
-            </a:pPr>
-            <a:r>
-              <a:t>• Indexes speed queries; validation protects data quality</a:t>
-            </a:r>
-          </a:p>
-          <a:p>
-            <a:pPr>
-              <a:spcAft>
-                <a:spcPts val="600"/>
-              </a:spcAft>
-              <a:defRPr sz="1800">
-                <a:solidFill>
-                  <a:srgbClr val="232B2B"/>
-                </a:solidFill>
-              </a:defRPr>
-            </a:pPr>
-            <a:r>
-              <a:t>• MERN: Express + Mongoose will replace DummyJSON for real persistence</a:t>
-            </a:r>
-          </a:p>
-        </p:txBody>
-      </p:sp>
-    </p:spTree>
-  </p:cSld>
-  <p:clrMapOvr>
-    <a:masterClrMapping/>
-  </p:clrMapOvr>
-</p:sld>
-</file>
-
-<file path=ppt/slides/slide46.xml><?xml version="1.0" encoding="utf-8"?>
+<file path=ppt/slides/slide42.xml><?xml version="1.0" encoding="utf-8"?>
 <p:sld xmlns:a="http://schemas.openxmlformats.org/drawingml/2006/main" xmlns:r="http://schemas.openxmlformats.org/officeDocument/2006/relationships" xmlns:p="http://schemas.openxmlformats.org/presentationml/2006/main">
   <p:cSld>
     <p:spTree>
